--- a/投資家向け企画書.pptx
+++ b/投資家向け企画書.pptx
@@ -28595,8 +28595,8 @@
         </p:nvSpPr>
         <p:spPr>
           <a:xfrm>
-            <a:off x="594360" y="1481328"/>
-            <a:ext cx="2544318" cy="1188720"/>
+            <a:off x="594360" y="1335024"/>
+            <a:ext cx="2544318" cy="1060704"/>
           </a:xfrm>
           <a:prstGeom prst="rect">
             <a:avLst/>
@@ -28615,7 +28615,7 @@
         </p:nvSpPr>
         <p:spPr>
           <a:xfrm>
-            <a:off x="813816" y="1737360"/>
+            <a:off x="813816" y="1591056"/>
             <a:ext cx="109728" cy="109728"/>
           </a:xfrm>
           <a:prstGeom prst="rect">
@@ -28635,7 +28635,7 @@
         </p:nvSpPr>
         <p:spPr>
           <a:xfrm>
-            <a:off x="1033272" y="1645920"/>
+            <a:off x="1033272" y="1499616"/>
             <a:ext cx="1885950" cy="292608"/>
           </a:xfrm>
           <a:prstGeom prst="rect">
@@ -28674,8 +28674,8 @@
         </p:nvSpPr>
         <p:spPr>
           <a:xfrm>
-            <a:off x="1033272" y="1993392"/>
-            <a:ext cx="1885950" cy="493776"/>
+            <a:off x="1033272" y="1847088"/>
+            <a:ext cx="1885950" cy="365760"/>
           </a:xfrm>
           <a:prstGeom prst="rect">
             <a:avLst/>
@@ -28694,7 +28694,7 @@
               <a:buNone/>
             </a:pPr>
             <a:r>
-              <a:rPr lang="en-US" sz="950" dirty="0">
+              <a:rPr lang="en-US" sz="900" dirty="0">
                 <a:solidFill>
                   <a:srgbClr val="3A3A42"/>
                 </a:solidFill>
@@ -28704,7 +28704,7 @@
               </a:rPr>
               <a:t>日産＝オースチン技術提携</a:t>
             </a:r>
-            <a:endParaRPr lang="en-US" sz="950" dirty="0"/>
+            <a:endParaRPr lang="en-US" sz="900" dirty="0"/>
           </a:p>
           <a:p>
             <a:pPr indent="0" marL="0">
@@ -28714,7 +28714,7 @@
               <a:buNone/>
             </a:pPr>
             <a:r>
-              <a:rPr lang="en-US" sz="950" dirty="0">
+              <a:rPr lang="en-US" sz="900" dirty="0">
                 <a:solidFill>
                   <a:srgbClr val="3A3A42"/>
                 </a:solidFill>
@@ -28724,7 +28724,7 @@
               </a:rPr>
               <a:t>日野＝ルノー、いすゞ＝ルーツ</a:t>
             </a:r>
-            <a:endParaRPr lang="en-US" sz="950" dirty="0"/>
+            <a:endParaRPr lang="en-US" sz="900" dirty="0"/>
           </a:p>
         </p:txBody>
       </p:sp>
@@ -28736,8 +28736,8 @@
         </p:nvSpPr>
         <p:spPr>
           <a:xfrm>
-            <a:off x="3412998" y="1481328"/>
-            <a:ext cx="2544318" cy="1188720"/>
+            <a:off x="3412998" y="1335024"/>
+            <a:ext cx="2544318" cy="1060704"/>
           </a:xfrm>
           <a:prstGeom prst="rect">
             <a:avLst/>
@@ -28756,7 +28756,7 @@
         </p:nvSpPr>
         <p:spPr>
           <a:xfrm>
-            <a:off x="3632454" y="1737360"/>
+            <a:off x="3632454" y="1591056"/>
             <a:ext cx="109728" cy="109728"/>
           </a:xfrm>
           <a:prstGeom prst="rect">
@@ -28776,7 +28776,7 @@
         </p:nvSpPr>
         <p:spPr>
           <a:xfrm>
-            <a:off x="3851910" y="1645920"/>
+            <a:off x="3851910" y="1499616"/>
             <a:ext cx="1885950" cy="292608"/>
           </a:xfrm>
           <a:prstGeom prst="rect">
@@ -28815,8 +28815,8 @@
         </p:nvSpPr>
         <p:spPr>
           <a:xfrm>
-            <a:off x="3851910" y="1993392"/>
-            <a:ext cx="1885950" cy="493776"/>
+            <a:off x="3851910" y="1847088"/>
+            <a:ext cx="1885950" cy="365760"/>
           </a:xfrm>
           <a:prstGeom prst="rect">
             <a:avLst/>
@@ -28835,7 +28835,7 @@
               <a:buNone/>
             </a:pPr>
             <a:r>
-              <a:rPr lang="en-US" sz="950" dirty="0">
+              <a:rPr lang="en-US" sz="900" dirty="0">
                 <a:solidFill>
                   <a:srgbClr val="3A3A42"/>
                 </a:solidFill>
@@ -28845,7 +28845,7 @@
               </a:rPr>
               <a:t>4社が相次いで完全国産化</a:t>
             </a:r>
-            <a:endParaRPr lang="en-US" sz="950" dirty="0"/>
+            <a:endParaRPr lang="en-US" sz="900" dirty="0"/>
           </a:p>
           <a:p>
             <a:pPr indent="0" marL="0">
@@ -28855,7 +28855,7 @@
               <a:buNone/>
             </a:pPr>
             <a:r>
-              <a:rPr lang="en-US" sz="950" dirty="0">
+              <a:rPr lang="en-US" sz="900" dirty="0">
                 <a:solidFill>
                   <a:srgbClr val="3A3A42"/>
                 </a:solidFill>
@@ -28865,7 +28865,7 @@
               </a:rPr>
               <a:t>ここまで4年</a:t>
             </a:r>
-            <a:endParaRPr lang="en-US" sz="950" dirty="0"/>
+            <a:endParaRPr lang="en-US" sz="900" dirty="0"/>
           </a:p>
         </p:txBody>
       </p:sp>
@@ -28877,8 +28877,8 @@
         </p:nvSpPr>
         <p:spPr>
           <a:xfrm>
-            <a:off x="6231636" y="1481328"/>
-            <a:ext cx="2544318" cy="1188720"/>
+            <a:off x="6231636" y="1335024"/>
+            <a:ext cx="2544318" cy="1060704"/>
           </a:xfrm>
           <a:prstGeom prst="rect">
             <a:avLst/>
@@ -28897,7 +28897,7 @@
         </p:nvSpPr>
         <p:spPr>
           <a:xfrm>
-            <a:off x="6451092" y="1737360"/>
+            <a:off x="6451092" y="1591056"/>
             <a:ext cx="109728" cy="109728"/>
           </a:xfrm>
           <a:prstGeom prst="rect">
@@ -28917,7 +28917,7 @@
         </p:nvSpPr>
         <p:spPr>
           <a:xfrm>
-            <a:off x="6670548" y="1645920"/>
+            <a:off x="6670548" y="1499616"/>
             <a:ext cx="1885950" cy="292608"/>
           </a:xfrm>
           <a:prstGeom prst="rect">
@@ -28956,8 +28956,8 @@
         </p:nvSpPr>
         <p:spPr>
           <a:xfrm>
-            <a:off x="6670548" y="1993392"/>
-            <a:ext cx="1885950" cy="493776"/>
+            <a:off x="6670548" y="1847088"/>
+            <a:ext cx="1885950" cy="365760"/>
           </a:xfrm>
           <a:prstGeom prst="rect">
             <a:avLst/>
@@ -28976,7 +28976,7 @@
               <a:buNone/>
             </a:pPr>
             <a:r>
-              <a:rPr lang="en-US" sz="950" dirty="0">
+              <a:rPr lang="en-US" sz="900" dirty="0">
                 <a:solidFill>
                   <a:srgbClr val="3A3A42"/>
                 </a:solidFill>
@@ -28986,7 +28986,7 @@
               </a:rPr>
               <a:t>QCサークル・トヨタ生産方式</a:t>
             </a:r>
-            <a:endParaRPr lang="en-US" sz="950" dirty="0"/>
+            <a:endParaRPr lang="en-US" sz="900" dirty="0"/>
           </a:p>
           <a:p>
             <a:pPr indent="0" marL="0">
@@ -28996,7 +28996,7 @@
               <a:buNone/>
             </a:pPr>
             <a:r>
-              <a:rPr lang="en-US" sz="950" dirty="0">
+              <a:rPr lang="en-US" sz="900" dirty="0">
                 <a:solidFill>
                   <a:srgbClr val="3A3A42"/>
                 </a:solidFill>
@@ -29006,7 +29006,7 @@
               </a:rPr>
               <a:t>改善を20年以上回し続ける</a:t>
             </a:r>
-            <a:endParaRPr lang="en-US" sz="950" dirty="0"/>
+            <a:endParaRPr lang="en-US" sz="900" dirty="0"/>
           </a:p>
         </p:txBody>
       </p:sp>
@@ -29018,8 +29018,8 @@
         </p:nvSpPr>
         <p:spPr>
           <a:xfrm>
-            <a:off x="9050274" y="1481328"/>
-            <a:ext cx="2544318" cy="1188720"/>
+            <a:off x="9050274" y="1335024"/>
+            <a:ext cx="2544318" cy="1060704"/>
           </a:xfrm>
           <a:prstGeom prst="rect">
             <a:avLst/>
@@ -29038,7 +29038,7 @@
         </p:nvSpPr>
         <p:spPr>
           <a:xfrm>
-            <a:off x="9269730" y="1737360"/>
+            <a:off x="9269730" y="1591056"/>
             <a:ext cx="109728" cy="109728"/>
           </a:xfrm>
           <a:prstGeom prst="rect">
@@ -29058,7 +29058,7 @@
         </p:nvSpPr>
         <p:spPr>
           <a:xfrm>
-            <a:off x="9489186" y="1645920"/>
+            <a:off x="9489186" y="1499616"/>
             <a:ext cx="1885950" cy="292608"/>
           </a:xfrm>
           <a:prstGeom prst="rect">
@@ -29097,8 +29097,295 @@
         </p:nvSpPr>
         <p:spPr>
           <a:xfrm>
-            <a:off x="9489186" y="1993392"/>
-            <a:ext cx="1885950" cy="493776"/>
+            <a:off x="9489186" y="1847088"/>
+            <a:ext cx="1885950" cy="365760"/>
+          </a:xfrm>
+          <a:prstGeom prst="rect">
+            <a:avLst/>
+          </a:prstGeom>
+          <a:noFill/>
+          <a:ln/>
+        </p:spPr>
+        <p:txBody>
+          <a:bodyPr wrap="square" lIns="0" tIns="0" rIns="0" bIns="0" rtlCol="0" anchor="t"/>
+          <a:lstStyle/>
+          <a:p>
+            <a:pPr indent="0" marL="0">
+              <a:lnSpc>
+                <a:spcPct val="126000"/>
+              </a:lnSpc>
+              <a:buNone/>
+            </a:pPr>
+            <a:r>
+              <a:rPr lang="en-US" sz="900" dirty="0">
+                <a:solidFill>
+                  <a:srgbClr val="3A3A42"/>
+                </a:solidFill>
+                <a:latin typeface="Yu Gothic" pitchFamily="34" charset="0"/>
+                <a:ea typeface="Yu Gothic" pitchFamily="34" charset="-122"/>
+                <a:cs typeface="Yu Gothic" pitchFamily="34" charset="-120"/>
+              </a:rPr>
+              <a:t>品質と燃費で世界市場を取る</a:t>
+            </a:r>
+            <a:endParaRPr lang="en-US" sz="900" dirty="0"/>
+          </a:p>
+          <a:p>
+            <a:pPr indent="0" marL="0">
+              <a:lnSpc>
+                <a:spcPct val="126000"/>
+              </a:lnSpc>
+              <a:buNone/>
+            </a:pPr>
+            <a:r>
+              <a:rPr lang="en-US" sz="900" dirty="0">
+                <a:solidFill>
+                  <a:srgbClr val="3A3A42"/>
+                </a:solidFill>
+                <a:latin typeface="Yu Gothic" pitchFamily="34" charset="0"/>
+                <a:ea typeface="Yu Gothic" pitchFamily="34" charset="-122"/>
+                <a:cs typeface="Yu Gothic" pitchFamily="34" charset="-120"/>
+              </a:rPr>
+              <a:t>米国メーカーが学びに来る側へ</a:t>
+            </a:r>
+            <a:endParaRPr lang="en-US" sz="900" dirty="0"/>
+          </a:p>
+        </p:txBody>
+      </p:sp>
+      <p:pic>
+        <p:nvPicPr>
+          <p:cNvPr id="22" name="Image 0" descr="assets/austin1959.jpg"/>
+          <p:cNvPicPr>
+            <a:picLocks noChangeAspect="1"/>
+          </p:cNvPicPr>
+          <p:nvPr/>
+        </p:nvPicPr>
+        <p:blipFill>
+          <a:blip r:embed="rId1"/>
+          <a:stretch>
+            <a:fillRect/>
+          </a:stretch>
+        </p:blipFill>
+        <p:spPr>
+          <a:xfrm>
+            <a:off x="594360" y="2560320"/>
+            <a:ext cx="2231136" cy="1188720"/>
+          </a:xfrm>
+          <a:prstGeom prst="rect">
+            <a:avLst/>
+          </a:prstGeom>
+        </p:spPr>
+      </p:pic>
+      <p:sp>
+        <p:nvSpPr>
+          <p:cNvPr id="23" name="Shape 20"/>
+          <p:cNvSpPr/>
+          <p:nvPr/>
+        </p:nvSpPr>
+        <p:spPr>
+          <a:xfrm>
+            <a:off x="2935224" y="2990088"/>
+            <a:ext cx="402336" cy="329184"/>
+          </a:xfrm>
+          <a:prstGeom prst="rightArrow">
+            <a:avLst/>
+          </a:prstGeom>
+          <a:solidFill>
+            <a:srgbClr val="DCD9D4"/>
+          </a:solidFill>
+          <a:ln/>
+        </p:spPr>
+      </p:sp>
+      <p:pic>
+        <p:nvPicPr>
+          <p:cNvPr id="24" name="Image 1" descr="assets/corolla1986.jpg"/>
+          <p:cNvPicPr>
+            <a:picLocks noChangeAspect="1"/>
+          </p:cNvPicPr>
+          <p:nvPr/>
+        </p:nvPicPr>
+        <p:blipFill>
+          <a:blip r:embed="rId2"/>
+          <a:stretch>
+            <a:fillRect/>
+          </a:stretch>
+        </p:blipFill>
+        <p:spPr>
+          <a:xfrm>
+            <a:off x="3447288" y="2560320"/>
+            <a:ext cx="2231136" cy="1188720"/>
+          </a:xfrm>
+          <a:prstGeom prst="rect">
+            <a:avLst/>
+          </a:prstGeom>
+        </p:spPr>
+      </p:pic>
+      <p:sp>
+        <p:nvSpPr>
+          <p:cNvPr id="25" name="Text 21"/>
+          <p:cNvSpPr txBox="1"/>
+          <p:nvPr/>
+        </p:nvSpPr>
+        <p:spPr>
+          <a:xfrm>
+            <a:off x="594360" y="3785616"/>
+            <a:ext cx="2231136" cy="219456"/>
+          </a:xfrm>
+          <a:prstGeom prst="rect">
+            <a:avLst/>
+          </a:prstGeom>
+          <a:noFill/>
+          <a:ln/>
+        </p:spPr>
+        <p:txBody>
+          <a:bodyPr wrap="square" lIns="0" tIns="0" rIns="0" bIns="0" rtlCol="0" anchor="ctr"/>
+          <a:lstStyle/>
+          <a:p>
+            <a:pPr algn="ctr" indent="0" marL="0">
+              <a:buNone/>
+            </a:pPr>
+            <a:r>
+              <a:rPr lang="en-US" sz="850" dirty="0">
+                <a:solidFill>
+                  <a:srgbClr val="6E6E76"/>
+                </a:solidFill>
+                <a:latin typeface="Yu Gothic" pitchFamily="34" charset="0"/>
+                <a:ea typeface="Yu Gothic" pitchFamily="34" charset="-122"/>
+                <a:cs typeface="Yu Gothic" pitchFamily="34" charset="-120"/>
+              </a:rPr>
+              <a:t>1959 日産オースチン A50</a:t>
+            </a:r>
+            <a:endParaRPr lang="en-US" sz="850" dirty="0"/>
+          </a:p>
+        </p:txBody>
+      </p:sp>
+      <p:sp>
+        <p:nvSpPr>
+          <p:cNvPr id="26" name="Text 22"/>
+          <p:cNvSpPr txBox="1"/>
+          <p:nvPr/>
+        </p:nvSpPr>
+        <p:spPr>
+          <a:xfrm>
+            <a:off x="3447288" y="3785616"/>
+            <a:ext cx="2231136" cy="219456"/>
+          </a:xfrm>
+          <a:prstGeom prst="rect">
+            <a:avLst/>
+          </a:prstGeom>
+          <a:noFill/>
+          <a:ln/>
+        </p:spPr>
+        <p:txBody>
+          <a:bodyPr wrap="square" lIns="0" tIns="0" rIns="0" bIns="0" rtlCol="0" anchor="ctr"/>
+          <a:lstStyle/>
+          <a:p>
+            <a:pPr algn="ctr" indent="0" marL="0">
+              <a:buNone/>
+            </a:pPr>
+            <a:r>
+              <a:rPr lang="en-US" sz="850" dirty="0">
+                <a:solidFill>
+                  <a:srgbClr val="6E6E76"/>
+                </a:solidFill>
+                <a:latin typeface="Yu Gothic" pitchFamily="34" charset="0"/>
+                <a:ea typeface="Yu Gothic" pitchFamily="34" charset="-122"/>
+                <a:cs typeface="Yu Gothic" pitchFamily="34" charset="-120"/>
+              </a:rPr>
+              <a:t>1986 トヨタ カローラ</a:t>
+            </a:r>
+            <a:endParaRPr lang="en-US" sz="850" dirty="0"/>
+          </a:p>
+        </p:txBody>
+      </p:sp>
+      <p:sp>
+        <p:nvSpPr>
+          <p:cNvPr id="27" name="Shape 23"/>
+          <p:cNvSpPr/>
+          <p:nvPr/>
+        </p:nvSpPr>
+        <p:spPr>
+          <a:xfrm>
+            <a:off x="5952744" y="2560320"/>
+            <a:ext cx="5641848" cy="1444752"/>
+          </a:xfrm>
+          <a:prstGeom prst="rect">
+            <a:avLst/>
+          </a:prstGeom>
+          <a:solidFill>
+            <a:srgbClr val="FBF1F1"/>
+          </a:solidFill>
+          <a:ln/>
+        </p:spPr>
+      </p:sp>
+      <p:sp>
+        <p:nvSpPr>
+          <p:cNvPr id="28" name="Shape 24"/>
+          <p:cNvSpPr/>
+          <p:nvPr/>
+        </p:nvSpPr>
+        <p:spPr>
+          <a:xfrm>
+            <a:off x="5952744" y="2560320"/>
+            <a:ext cx="45720" cy="1444752"/>
+          </a:xfrm>
+          <a:prstGeom prst="rect">
+            <a:avLst/>
+          </a:prstGeom>
+          <a:solidFill>
+            <a:srgbClr val="B3121B"/>
+          </a:solidFill>
+          <a:ln/>
+        </p:spPr>
+      </p:sp>
+      <p:sp>
+        <p:nvSpPr>
+          <p:cNvPr id="29" name="Text 25"/>
+          <p:cNvSpPr txBox="1"/>
+          <p:nvPr/>
+        </p:nvSpPr>
+        <p:spPr>
+          <a:xfrm>
+            <a:off x="6208776" y="2706624"/>
+            <a:ext cx="5184648" cy="274320"/>
+          </a:xfrm>
+          <a:prstGeom prst="rect">
+            <a:avLst/>
+          </a:prstGeom>
+          <a:noFill/>
+          <a:ln/>
+        </p:spPr>
+        <p:txBody>
+          <a:bodyPr wrap="square" lIns="0" tIns="0" rIns="0" bIns="0" rtlCol="0" anchor="ctr"/>
+          <a:lstStyle/>
+          <a:p>
+            <a:pPr indent="0" marL="0">
+              <a:buNone/>
+            </a:pPr>
+            <a:r>
+              <a:rPr lang="en-US" sz="1200" b="1" dirty="0">
+                <a:solidFill>
+                  <a:srgbClr val="B3121B"/>
+                </a:solidFill>
+                <a:latin typeface="Yu Gothic" pitchFamily="34" charset="0"/>
+                <a:ea typeface="Yu Gothic" pitchFamily="34" charset="-122"/>
+                <a:cs typeface="Yu Gothic" pitchFamily="34" charset="-120"/>
+              </a:rPr>
+              <a:t>⚠ ポイントは国産化の速さではありません</a:t>
+            </a:r>
+            <a:endParaRPr lang="en-US" sz="1200" dirty="0"/>
+          </a:p>
+        </p:txBody>
+      </p:sp>
+      <p:sp>
+        <p:nvSpPr>
+          <p:cNvPr id="30" name="Text 26"/>
+          <p:cNvSpPr txBox="1"/>
+          <p:nvPr/>
+        </p:nvSpPr>
+        <p:spPr>
+          <a:xfrm>
+            <a:off x="6208776" y="3035808"/>
+            <a:ext cx="5184648" cy="822960"/>
           </a:xfrm>
           <a:prstGeom prst="rect">
             <a:avLst/>
@@ -29125,7 +29412,7 @@
                 <a:ea typeface="Yu Gothic" pitchFamily="34" charset="-122"/>
                 <a:cs typeface="Yu Gothic" pitchFamily="34" charset="-120"/>
               </a:rPr>
-              <a:t>品質と燃費で世界市場を取る</a:t>
+              <a:t>日産・トヨタは国産化をゴールにせず、以後20年以上かけて生産方式と品質管理を磨き続けました。</a:t>
             </a:r>
             <a:endParaRPr lang="en-US" sz="950" dirty="0"/>
           </a:p>
@@ -29145,7 +29432,27 @@
                 <a:ea typeface="Yu Gothic" pitchFamily="34" charset="-122"/>
                 <a:cs typeface="Yu Gothic" pitchFamily="34" charset="-120"/>
               </a:rPr>
-              <a:t>米国メーカーが学びに来る側へ</a:t>
+              <a:t>1980年代には米国メーカーが日本の生産方式を学びに来る側に回ります。</a:t>
+            </a:r>
+            <a:endParaRPr lang="en-US" sz="950" dirty="0"/>
+          </a:p>
+          <a:p>
+            <a:pPr indent="0" marL="0">
+              <a:lnSpc>
+                <a:spcPct val="126000"/>
+              </a:lnSpc>
+              <a:buNone/>
+            </a:pPr>
+            <a:r>
+              <a:rPr lang="en-US" sz="950" dirty="0">
+                <a:solidFill>
+                  <a:srgbClr val="3A3A42"/>
+                </a:solidFill>
+                <a:latin typeface="Yu Gothic" pitchFamily="34" charset="0"/>
+                <a:ea typeface="Yu Gothic" pitchFamily="34" charset="-122"/>
+                <a:cs typeface="Yu Gothic" pitchFamily="34" charset="-120"/>
+              </a:rPr>
+              <a:t>内製化（3年）は出発点にすぎません。制作データで改善を回し続けることが、模倣されない資産になります。</a:t>
             </a:r>
             <a:endParaRPr lang="en-US" sz="950" dirty="0"/>
           </a:p>
@@ -29166,7 +29473,7 @@
           </p:nvPr>
         </p:nvGraphicFramePr>
         <p:xfrm>
-          <a:off x="594360" y="2944368"/>
+          <a:off x="594360" y="4133088"/>
           <a:ext cx="11000232" cy="914400"/>
         </p:xfrm>
         <a:graphic>
@@ -30395,154 +30702,13 @@
       </p:graphicFrame>
       <p:sp>
         <p:nvSpPr>
-          <p:cNvPr id="23" name="Shape 20"/>
-          <p:cNvSpPr/>
-          <p:nvPr/>
-        </p:nvSpPr>
-        <p:spPr>
-          <a:xfrm>
-            <a:off x="594360" y="4224528"/>
-            <a:ext cx="11000232" cy="1060704"/>
-          </a:xfrm>
-          <a:prstGeom prst="rect">
-            <a:avLst/>
-          </a:prstGeom>
-          <a:solidFill>
-            <a:srgbClr val="FBF1F1"/>
-          </a:solidFill>
-          <a:ln/>
-        </p:spPr>
-      </p:sp>
-      <p:sp>
-        <p:nvSpPr>
-          <p:cNvPr id="24" name="Shape 21"/>
-          <p:cNvSpPr/>
-          <p:nvPr/>
-        </p:nvSpPr>
-        <p:spPr>
-          <a:xfrm>
-            <a:off x="594360" y="4224528"/>
-            <a:ext cx="45720" cy="1060704"/>
-          </a:xfrm>
-          <a:prstGeom prst="rect">
-            <a:avLst/>
-          </a:prstGeom>
-          <a:solidFill>
-            <a:srgbClr val="B3121B"/>
-          </a:solidFill>
-          <a:ln/>
-        </p:spPr>
-      </p:sp>
-      <p:sp>
-        <p:nvSpPr>
-          <p:cNvPr id="25" name="Text 22"/>
+          <p:cNvPr id="32" name="Text 27"/>
           <p:cNvSpPr txBox="1"/>
           <p:nvPr/>
         </p:nvSpPr>
         <p:spPr>
           <a:xfrm>
-            <a:off x="850392" y="4370832"/>
-            <a:ext cx="10543032" cy="274320"/>
-          </a:xfrm>
-          <a:prstGeom prst="rect">
-            <a:avLst/>
-          </a:prstGeom>
-          <a:noFill/>
-          <a:ln/>
-        </p:spPr>
-        <p:txBody>
-          <a:bodyPr wrap="square" lIns="0" tIns="0" rIns="0" bIns="0" rtlCol="0" anchor="ctr"/>
-          <a:lstStyle/>
-          <a:p>
-            <a:pPr indent="0" marL="0">
-              <a:buNone/>
-            </a:pPr>
-            <a:r>
-              <a:rPr lang="en-US" sz="1200" b="1" dirty="0">
-                <a:solidFill>
-                  <a:srgbClr val="B3121B"/>
-                </a:solidFill>
-                <a:latin typeface="Yu Gothic" pitchFamily="34" charset="0"/>
-                <a:ea typeface="Yu Gothic" pitchFamily="34" charset="-122"/>
-                <a:cs typeface="Yu Gothic" pitchFamily="34" charset="-120"/>
-              </a:rPr>
-              <a:t>⚠ ポイントは国産化の速さではありません。その後の改善で世界一の品質を築いたことです</a:t>
-            </a:r>
-            <a:endParaRPr lang="en-US" sz="1200" dirty="0"/>
-          </a:p>
-        </p:txBody>
-      </p:sp>
-      <p:sp>
-        <p:nvSpPr>
-          <p:cNvPr id="26" name="Text 23"/>
-          <p:cNvSpPr txBox="1"/>
-          <p:nvPr/>
-        </p:nvSpPr>
-        <p:spPr>
-          <a:xfrm>
-            <a:off x="850392" y="4700016"/>
-            <a:ext cx="10543032" cy="438912"/>
-          </a:xfrm>
-          <a:prstGeom prst="rect">
-            <a:avLst/>
-          </a:prstGeom>
-          <a:noFill/>
-          <a:ln/>
-        </p:spPr>
-        <p:txBody>
-          <a:bodyPr wrap="square" lIns="0" tIns="0" rIns="0" bIns="0" rtlCol="0" anchor="t"/>
-          <a:lstStyle/>
-          <a:p>
-            <a:pPr indent="0" marL="0">
-              <a:lnSpc>
-                <a:spcPct val="126000"/>
-              </a:lnSpc>
-              <a:buNone/>
-            </a:pPr>
-            <a:r>
-              <a:rPr lang="en-US" sz="1000" dirty="0">
-                <a:solidFill>
-                  <a:srgbClr val="3A3A42"/>
-                </a:solidFill>
-                <a:latin typeface="Yu Gothic" pitchFamily="34" charset="0"/>
-                <a:ea typeface="Yu Gothic" pitchFamily="34" charset="-122"/>
-                <a:cs typeface="Yu Gothic" pitchFamily="34" charset="-120"/>
-              </a:rPr>
-              <a:t>日産・トヨタは国産化をゴールにせず、以後20年以上かけて生産方式と品質管理を磨き続けました。</a:t>
-            </a:r>
-            <a:endParaRPr lang="en-US" sz="1000" dirty="0"/>
-          </a:p>
-          <a:p>
-            <a:pPr indent="0" marL="0">
-              <a:lnSpc>
-                <a:spcPct val="126000"/>
-              </a:lnSpc>
-              <a:buNone/>
-            </a:pPr>
-            <a:r>
-              <a:rPr lang="en-US" sz="1000" dirty="0">
-                <a:solidFill>
-                  <a:srgbClr val="3A3A42"/>
-                </a:solidFill>
-                <a:latin typeface="Yu Gothic" pitchFamily="34" charset="0"/>
-                <a:ea typeface="Yu Gothic" pitchFamily="34" charset="-122"/>
-                <a:cs typeface="Yu Gothic" pitchFamily="34" charset="-120"/>
-              </a:rPr>
-              <a:t>当社も同じです。内製化（3年）は出発点で、制作データで改善を回し続けることが模倣されない資産になります。</a:t>
-            </a:r>
-            <a:endParaRPr lang="en-US" sz="1000" dirty="0"/>
-          </a:p>
-        </p:txBody>
-      </p:sp>
-      <p:sp>
-        <p:nvSpPr>
-          <p:cNvPr id="27" name="Text 24"/>
-          <p:cNvSpPr txBox="1"/>
-          <p:nvPr/>
-        </p:nvSpPr>
-        <p:spPr>
-          <a:xfrm>
-            <a:off x="594360" y="5431536"/>
+            <a:off x="594360" y="5358384"/>
             <a:ext cx="11000232" cy="310896"/>
           </a:xfrm>
           <a:prstGeom prst="rect">
@@ -30575,7 +30741,7 @@
       </p:sp>
       <p:sp>
         <p:nvSpPr>
-          <p:cNvPr id="28" name="Text 25"/>
+          <p:cNvPr id="33" name="Text 28"/>
           <p:cNvSpPr txBox="1"/>
           <p:nvPr/>
         </p:nvSpPr>
@@ -30606,7 +30772,7 @@
                 <a:ea typeface="Yu Gothic" pitchFamily="34" charset="-122"/>
                 <a:cs typeface="Yu Gothic" pitchFamily="34" charset="-120"/>
               </a:rPr>
-              <a:t>出所: 日産自動車 企業情報 ／ トヨタ博物館 ／ GAZOO「ノックダウン生産の時代」／ 日本科学技術連盟（QCサークル・デミング賞）</a:t>
+              <a:t>出所: 日産自動車 企業情報 ／ トヨタ博物館 ／ GAZOO「ノックダウン生産の時代」／ 日本科学技術連盟（QCサークル・デミング賞）。写真: 1959 Nissan Austin Cambridge Deluxe（CC0 / TTTNIS）、1986-1989 Toyota Corolla AE82（Public domain / OSX）いずれも Wikimedia Commons</a:t>
             </a:r>
             <a:endParaRPr lang="en-US" sz="850" dirty="0"/>
           </a:p>
@@ -30614,7 +30780,7 @@
       </p:sp>
       <p:sp>
         <p:nvSpPr>
-          <p:cNvPr id="29" name="Text 26"/>
+          <p:cNvPr id="34" name="Text 29"/>
           <p:cNvSpPr txBox="1"/>
           <p:nvPr/>
         </p:nvSpPr>

--- a/投資家向け企画書.pptx
+++ b/投資家向け企画書.pptx
@@ -937,14 +937,34 @@
       </p:sp>
       <p:sp>
         <p:nvSpPr>
-          <p:cNvPr id="5" name="Text 2"/>
-          <p:cNvSpPr txBox="1"/>
+          <p:cNvPr id="5" name="Shape 2"/>
+          <p:cNvSpPr/>
           <p:nvPr/>
         </p:nvSpPr>
         <p:spPr>
           <a:xfrm>
             <a:off x="594360" y="2578608"/>
             <a:ext cx="10881360" cy="1380744"/>
+          </a:xfrm>
+          <a:prstGeom prst="rect">
+            <a:avLst/>
+          </a:prstGeom>
+          <a:solidFill>
+            <a:srgbClr val="FF9900"/>
+          </a:solidFill>
+          <a:ln/>
+        </p:spPr>
+      </p:sp>
+      <p:sp>
+        <p:nvSpPr>
+          <p:cNvPr id="6" name="Text 3"/>
+          <p:cNvSpPr txBox="1"/>
+          <p:nvPr/>
+        </p:nvSpPr>
+        <p:spPr>
+          <a:xfrm>
+            <a:off x="850392" y="2578608"/>
+            <a:ext cx="10625328" cy="1380744"/>
           </a:xfrm>
           <a:prstGeom prst="rect">
             <a:avLst/>
@@ -968,7 +988,7 @@
                 <a:ea typeface="Yu Gothic" pitchFamily="34" charset="-122"/>
                 <a:cs typeface="Yu Gothic" pitchFamily="34" charset="-120"/>
               </a:rPr>
-              <a:t>次世代AI映像制作会社の設立</a:t>
+              <a:t>次世代AI映像制作会社の設立投資案件</a:t>
             </a:r>
             <a:endParaRPr lang="en-US" sz="4000" dirty="0"/>
           </a:p>
@@ -976,7 +996,7 @@
       </p:sp>
       <p:sp>
         <p:nvSpPr>
-          <p:cNvPr id="6" name="Text 3"/>
+          <p:cNvPr id="7" name="Text 4"/>
           <p:cNvSpPr txBox="1"/>
           <p:nvPr/>
         </p:nvSpPr>
@@ -1007,7 +1027,7 @@
                 <a:ea typeface="Yu Gothic" pitchFamily="34" charset="-122"/>
                 <a:cs typeface="Yu Gothic" pitchFamily="34" charset="-120"/>
               </a:rPr>
-              <a:t>東アジアを21世紀のハリウッドにするためのAI映像制作ハブとなるAI映像制作会社のシード投資のご案内</a:t>
+              <a:t>東アジアを21世紀のハリウッドにするためのAI映像制作ハブとするAI映像制作会社のシード投資のご案内</a:t>
             </a:r>
             <a:endParaRPr lang="en-US" sz="1500" dirty="0"/>
           </a:p>
@@ -1015,7 +1035,7 @@
       </p:sp>
       <p:sp>
         <p:nvSpPr>
-          <p:cNvPr id="7" name="Text 4"/>
+          <p:cNvPr id="8" name="Text 5"/>
           <p:cNvSpPr txBox="1"/>
           <p:nvPr/>
         </p:nvSpPr>
@@ -1054,7 +1074,7 @@
       </p:sp>
       <p:sp>
         <p:nvSpPr>
-          <p:cNvPr id="8" name="Text 5"/>
+          <p:cNvPr id="9" name="Text 6"/>
           <p:cNvSpPr txBox="1"/>
           <p:nvPr/>
         </p:nvSpPr>
@@ -2971,7 +2991,7 @@
             <a:avLst/>
           </a:prstGeom>
           <a:solidFill>
-            <a:srgbClr val="F4F2EF"/>
+            <a:srgbClr val="FCE5CD"/>
           </a:solidFill>
           <a:ln/>
         </p:spPr>
@@ -3092,7 +3112,7 @@
             <a:avLst/>
           </a:prstGeom>
           <a:solidFill>
-            <a:srgbClr val="F4F2EF"/>
+            <a:srgbClr val="FCE5CD"/>
           </a:solidFill>
           <a:ln/>
         </p:spPr>
@@ -3213,7 +3233,7 @@
             <a:avLst/>
           </a:prstGeom>
           <a:solidFill>
-            <a:srgbClr val="F4F2EF"/>
+            <a:srgbClr val="FCE5CD"/>
           </a:solidFill>
           <a:ln/>
         </p:spPr>
@@ -3334,7 +3354,7 @@
             <a:avLst/>
           </a:prstGeom>
           <a:solidFill>
-            <a:srgbClr val="F4F2EF"/>
+            <a:srgbClr val="FCE5CD"/>
           </a:solidFill>
           <a:ln/>
         </p:spPr>
@@ -5725,7 +5745,7 @@
             <a:avLst/>
           </a:prstGeom>
           <a:solidFill>
-            <a:srgbClr val="F4F2EF"/>
+            <a:srgbClr val="FCE5CD"/>
           </a:solidFill>
           <a:ln/>
         </p:spPr>
@@ -5826,7 +5846,7 @@
             <a:avLst/>
           </a:prstGeom>
           <a:solidFill>
-            <a:srgbClr val="F4F2EF"/>
+            <a:srgbClr val="FCE5CD"/>
           </a:solidFill>
           <a:ln/>
         </p:spPr>
@@ -5927,7 +5947,7 @@
             <a:avLst/>
           </a:prstGeom>
           <a:solidFill>
-            <a:srgbClr val="F4F2EF"/>
+            <a:srgbClr val="FCE5CD"/>
           </a:solidFill>
           <a:ln/>
         </p:spPr>
@@ -6028,7 +6048,7 @@
             <a:avLst/>
           </a:prstGeom>
           <a:solidFill>
-            <a:srgbClr val="F4F2EF"/>
+            <a:srgbClr val="FCE5CD"/>
           </a:solidFill>
           <a:ln/>
         </p:spPr>
@@ -6662,7 +6682,7 @@
             <a:avLst/>
           </a:prstGeom>
           <a:solidFill>
-            <a:srgbClr val="F4F2EF"/>
+            <a:srgbClr val="FCE5CD"/>
           </a:solidFill>
           <a:ln/>
         </p:spPr>
@@ -6802,7 +6822,7 @@
             <a:avLst/>
           </a:prstGeom>
           <a:solidFill>
-            <a:srgbClr val="F4F2EF"/>
+            <a:srgbClr val="FCE5CD"/>
           </a:solidFill>
           <a:ln/>
         </p:spPr>
@@ -6942,7 +6962,7 @@
             <a:avLst/>
           </a:prstGeom>
           <a:solidFill>
-            <a:srgbClr val="F4F2EF"/>
+            <a:srgbClr val="FCE5CD"/>
           </a:solidFill>
           <a:ln/>
         </p:spPr>
@@ -7082,7 +7102,7 @@
             <a:avLst/>
           </a:prstGeom>
           <a:solidFill>
-            <a:srgbClr val="F4F2EF"/>
+            <a:srgbClr val="FCE5CD"/>
           </a:solidFill>
           <a:ln/>
         </p:spPr>
@@ -7243,7 +7263,7 @@
             <a:avLst/>
           </a:prstGeom>
           <a:solidFill>
-            <a:srgbClr val="F4F2EF"/>
+            <a:srgbClr val="FCE5CD"/>
           </a:solidFill>
           <a:ln/>
         </p:spPr>
@@ -7870,7 +7890,7 @@
             <a:avLst/>
           </a:prstGeom>
           <a:solidFill>
-            <a:srgbClr val="6E6E76"/>
+            <a:srgbClr val="D9D2E9"/>
           </a:solidFill>
           <a:ln/>
         </p:spPr>
@@ -7968,7 +7988,7 @@
             <a:avLst/>
           </a:prstGeom>
           <a:solidFill>
-            <a:srgbClr val="6E6E76"/>
+            <a:srgbClr val="D9D2E9"/>
           </a:solidFill>
           <a:ln/>
         </p:spPr>
@@ -8066,7 +8086,7 @@
             <a:avLst/>
           </a:prstGeom>
           <a:solidFill>
-            <a:srgbClr val="6E6E76"/>
+            <a:srgbClr val="D9D2E9"/>
           </a:solidFill>
           <a:ln/>
         </p:spPr>
@@ -8164,7 +8184,7 @@
             <a:avLst/>
           </a:prstGeom>
           <a:solidFill>
-            <a:srgbClr val="6E6E76"/>
+            <a:srgbClr val="D9D2E9"/>
           </a:solidFill>
           <a:ln/>
         </p:spPr>
@@ -9769,7 +9789,7 @@
             <a:avLst/>
           </a:prstGeom>
           <a:solidFill>
-            <a:srgbClr val="F4F2EF"/>
+            <a:srgbClr val="FCE5CD"/>
           </a:solidFill>
           <a:ln/>
         </p:spPr>
@@ -9930,7 +9950,7 @@
             <a:avLst/>
           </a:prstGeom>
           <a:solidFill>
-            <a:srgbClr val="F4F2EF"/>
+            <a:srgbClr val="FCE5CD"/>
           </a:solidFill>
           <a:ln/>
         </p:spPr>
@@ -10091,7 +10111,7 @@
             <a:avLst/>
           </a:prstGeom>
           <a:solidFill>
-            <a:srgbClr val="F4F2EF"/>
+            <a:srgbClr val="FCE5CD"/>
           </a:solidFill>
           <a:ln/>
         </p:spPr>
@@ -10781,7 +10801,7 @@
             <a:avLst/>
           </a:prstGeom>
           <a:solidFill>
-            <a:srgbClr val="F4F2EF"/>
+            <a:srgbClr val="FCE5CD"/>
           </a:solidFill>
           <a:ln/>
         </p:spPr>
@@ -10860,7 +10880,7 @@
             <a:avLst/>
           </a:prstGeom>
           <a:solidFill>
-            <a:srgbClr val="F4F2EF"/>
+            <a:srgbClr val="FCE5CD"/>
           </a:solidFill>
           <a:ln/>
         </p:spPr>
@@ -10939,7 +10959,7 @@
             <a:avLst/>
           </a:prstGeom>
           <a:solidFill>
-            <a:srgbClr val="F4F2EF"/>
+            <a:srgbClr val="FCE5CD"/>
           </a:solidFill>
           <a:ln/>
         </p:spPr>
@@ -11018,7 +11038,7 @@
             <a:avLst/>
           </a:prstGeom>
           <a:solidFill>
-            <a:srgbClr val="F4F2EF"/>
+            <a:srgbClr val="FCE5CD"/>
           </a:solidFill>
           <a:ln/>
         </p:spPr>
@@ -12356,7 +12376,7 @@
             <a:avLst/>
           </a:prstGeom>
           <a:solidFill>
-            <a:srgbClr val="F4F2EF"/>
+            <a:srgbClr val="FCE5CD"/>
           </a:solidFill>
           <a:ln/>
         </p:spPr>
@@ -12517,7 +12537,7 @@
             <a:avLst/>
           </a:prstGeom>
           <a:solidFill>
-            <a:srgbClr val="F4F2EF"/>
+            <a:srgbClr val="FCE5CD"/>
           </a:solidFill>
           <a:ln/>
         </p:spPr>
@@ -12638,7 +12658,7 @@
             <a:avLst/>
           </a:prstGeom>
           <a:solidFill>
-            <a:srgbClr val="F4F2EF"/>
+            <a:srgbClr val="FCE5CD"/>
           </a:solidFill>
           <a:ln/>
         </p:spPr>
@@ -14981,7 +15001,7 @@
             <a:avLst/>
           </a:prstGeom>
           <a:solidFill>
-            <a:srgbClr val="F4F2EF"/>
+            <a:srgbClr val="FCE5CD"/>
           </a:solidFill>
           <a:ln/>
         </p:spPr>
@@ -15102,7 +15122,7 @@
             <a:avLst/>
           </a:prstGeom>
           <a:solidFill>
-            <a:srgbClr val="F4F2EF"/>
+            <a:srgbClr val="FCE5CD"/>
           </a:solidFill>
           <a:ln/>
         </p:spPr>
@@ -15223,7 +15243,7 @@
             <a:avLst/>
           </a:prstGeom>
           <a:solidFill>
-            <a:srgbClr val="F4F2EF"/>
+            <a:srgbClr val="FCE5CD"/>
           </a:solidFill>
           <a:ln/>
         </p:spPr>
@@ -16838,7 +16858,7 @@
             <a:avLst/>
           </a:prstGeom>
           <a:solidFill>
-            <a:srgbClr val="F4F2EF"/>
+            <a:srgbClr val="FCE5CD"/>
           </a:solidFill>
           <a:ln/>
         </p:spPr>
@@ -16999,7 +17019,7 @@
             <a:avLst/>
           </a:prstGeom>
           <a:solidFill>
-            <a:srgbClr val="F4F2EF"/>
+            <a:srgbClr val="FCE5CD"/>
           </a:solidFill>
           <a:ln/>
         </p:spPr>
@@ -17160,7 +17180,7 @@
             <a:avLst/>
           </a:prstGeom>
           <a:solidFill>
-            <a:srgbClr val="F4F2EF"/>
+            <a:srgbClr val="FCE5CD"/>
           </a:solidFill>
           <a:ln/>
         </p:spPr>
@@ -17321,7 +17341,7 @@
             <a:avLst/>
           </a:prstGeom>
           <a:solidFill>
-            <a:srgbClr val="F4F2EF"/>
+            <a:srgbClr val="FCE5CD"/>
           </a:solidFill>
           <a:ln/>
         </p:spPr>
@@ -17482,7 +17502,7 @@
             <a:avLst/>
           </a:prstGeom>
           <a:solidFill>
-            <a:srgbClr val="F4F2EF"/>
+            <a:srgbClr val="FCE5CD"/>
           </a:solidFill>
           <a:ln/>
         </p:spPr>
@@ -17623,7 +17643,7 @@
             <a:avLst/>
           </a:prstGeom>
           <a:solidFill>
-            <a:srgbClr val="F4F2EF"/>
+            <a:srgbClr val="FCE5CD"/>
           </a:solidFill>
           <a:ln/>
         </p:spPr>
@@ -18313,7 +18333,7 @@
             <a:avLst/>
           </a:prstGeom>
           <a:solidFill>
-            <a:srgbClr val="F4F2EF"/>
+            <a:srgbClr val="FCE5CD"/>
           </a:solidFill>
           <a:ln/>
         </p:spPr>
@@ -18453,7 +18473,7 @@
             <a:avLst/>
           </a:prstGeom>
           <a:solidFill>
-            <a:srgbClr val="F4F2EF"/>
+            <a:srgbClr val="FCE5CD"/>
           </a:solidFill>
           <a:ln/>
         </p:spPr>
@@ -18593,7 +18613,7 @@
             <a:avLst/>
           </a:prstGeom>
           <a:solidFill>
-            <a:srgbClr val="F4F2EF"/>
+            <a:srgbClr val="FCE5CD"/>
           </a:solidFill>
           <a:ln/>
         </p:spPr>
@@ -18772,7 +18792,7 @@
             <a:avLst/>
           </a:prstGeom>
           <a:solidFill>
-            <a:srgbClr val="F4F2EF"/>
+            <a:srgbClr val="FFF2CC"/>
           </a:solidFill>
           <a:ln/>
         </p:spPr>
@@ -18933,7 +18953,7 @@
             <a:avLst/>
           </a:prstGeom>
           <a:solidFill>
-            <a:srgbClr val="F4F2EF"/>
+            <a:srgbClr val="FFF2CC"/>
           </a:solidFill>
           <a:ln/>
         </p:spPr>
@@ -19544,7 +19564,7 @@
             <a:avLst/>
           </a:prstGeom>
           <a:solidFill>
-            <a:srgbClr val="F4F2EF"/>
+            <a:srgbClr val="FCE5CD"/>
           </a:solidFill>
           <a:ln/>
         </p:spPr>
@@ -19684,7 +19704,7 @@
             <a:avLst/>
           </a:prstGeom>
           <a:solidFill>
-            <a:srgbClr val="F4F2EF"/>
+            <a:srgbClr val="FCE5CD"/>
           </a:solidFill>
           <a:ln/>
         </p:spPr>
@@ -19803,7 +19823,7 @@
                 <a:ea typeface="Yu Gothic" pitchFamily="34" charset="-122"/>
                 <a:cs typeface="Yu Gothic" pitchFamily="34" charset="-120"/>
               </a:rPr>
-              <a:t>企業案件の仲介（初日から）＋ 越境C2C発注の手数料（6ヶ月目〜）＋ ツール外販（2期〜）</a:t>
+              <a:t>① AI映像制作 ② 越境C2C発注の手数料（6ヶ月目〜）③ 特許・制作用ツール外販（2期〜）</a:t>
             </a:r>
             <a:endParaRPr lang="en-US" sz="900" dirty="0"/>
           </a:p>
@@ -19824,7 +19844,7 @@
             <a:avLst/>
           </a:prstGeom>
           <a:solidFill>
-            <a:srgbClr val="F4F2EF"/>
+            <a:srgbClr val="FCE5CD"/>
           </a:solidFill>
           <a:ln/>
         </p:spPr>
@@ -19964,7 +19984,7 @@
             <a:avLst/>
           </a:prstGeom>
           <a:solidFill>
-            <a:srgbClr val="F4F2EF"/>
+            <a:srgbClr val="FFF2CC"/>
           </a:solidFill>
           <a:ln/>
         </p:spPr>
@@ -20125,7 +20145,7 @@
             <a:avLst/>
           </a:prstGeom>
           <a:solidFill>
-            <a:srgbClr val="F4F2EF"/>
+            <a:srgbClr val="FFF2CC"/>
           </a:solidFill>
           <a:ln/>
         </p:spPr>
@@ -20225,7 +20245,7 @@
                 <a:ea typeface="Yu Gothic" pitchFamily="34" charset="-122"/>
                 <a:cs typeface="Yu Gothic" pitchFamily="34" charset="-120"/>
               </a:rPr>
-              <a:t>2026年、中国の大手PFは純AIコンテンツの分成を圧縮し、最低保証を廃止した。AI専業のクリエイターは行き場を探している。</a:t>
+              <a:t>生成AIで制作原価は下がったが、日本企業の発注価格は下がっていない。この差が粗利。</a:t>
             </a:r>
             <a:endParaRPr lang="en-US" sz="1000" dirty="0"/>
           </a:p>
@@ -20245,7 +20265,7 @@
                 <a:ea typeface="Yu Gothic" pitchFamily="34" charset="-122"/>
                 <a:cs typeface="Yu Gothic" pitchFamily="34" charset="-120"/>
               </a:rPr>
-              <a:t>企業案件があるので、トラフィックがゼロの初日からクリエイターに報酬を出せる。</a:t>
+              <a:t>日本企業は中華圏に直接発注しない。言語・商習慣・品質保証・契約が壁。</a:t>
             </a:r>
             <a:endParaRPr lang="en-US" sz="1000" dirty="0"/>
           </a:p>
@@ -20265,7 +20285,7 @@
                 <a:ea typeface="Yu Gothic" pitchFamily="34" charset="-122"/>
                 <a:cs typeface="Yu Gothic" pitchFamily="34" charset="-120"/>
               </a:rPr>
-              <a:t>分成率で折り合わない課題を解決する唯一の設計。</a:t>
+              <a:t>その壁を引き受けることが商品。差別化は価格ではなく「発注側の管理コストをゼロにする」こと。</a:t>
             </a:r>
             <a:endParaRPr lang="en-US" sz="1000" dirty="0"/>
           </a:p>
@@ -20286,7 +20306,7 @@
             <a:avLst/>
           </a:prstGeom>
           <a:solidFill>
-            <a:srgbClr val="F4F2EF"/>
+            <a:srgbClr val="FFF2CC"/>
           </a:solidFill>
           <a:ln/>
         </p:spPr>
@@ -23961,7 +23981,7 @@
             <a:avLst/>
           </a:prstGeom>
           <a:solidFill>
-            <a:srgbClr val="F4F2EF"/>
+            <a:srgbClr val="FCE5CD"/>
           </a:solidFill>
           <a:ln/>
         </p:spPr>
@@ -24101,7 +24121,7 @@
             <a:avLst/>
           </a:prstGeom>
           <a:solidFill>
-            <a:srgbClr val="F4F2EF"/>
+            <a:srgbClr val="FCE5CD"/>
           </a:solidFill>
           <a:ln/>
         </p:spPr>
@@ -28602,7 +28622,7 @@
             <a:avLst/>
           </a:prstGeom>
           <a:solidFill>
-            <a:srgbClr val="F4F2EF"/>
+            <a:srgbClr val="FCE5CD"/>
           </a:solidFill>
           <a:ln/>
         </p:spPr>
@@ -28743,7 +28763,7 @@
             <a:avLst/>
           </a:prstGeom>
           <a:solidFill>
-            <a:srgbClr val="F4F2EF"/>
+            <a:srgbClr val="FCE5CD"/>
           </a:solidFill>
           <a:ln/>
         </p:spPr>
@@ -28884,7 +28904,7 @@
             <a:avLst/>
           </a:prstGeom>
           <a:solidFill>
-            <a:srgbClr val="F4F2EF"/>
+            <a:srgbClr val="FCE5CD"/>
           </a:solidFill>
           <a:ln/>
         </p:spPr>
@@ -29025,7 +29045,7 @@
             <a:avLst/>
           </a:prstGeom>
           <a:solidFill>
-            <a:srgbClr val="F4F2EF"/>
+            <a:srgbClr val="FCE5CD"/>
           </a:solidFill>
           <a:ln/>
         </p:spPr>
@@ -31001,7 +31021,7 @@
             <a:avLst/>
           </a:prstGeom>
           <a:solidFill>
-            <a:srgbClr val="F4F2EF"/>
+            <a:srgbClr val="FCE5CD"/>
           </a:solidFill>
           <a:ln/>
         </p:spPr>
@@ -31142,7 +31162,7 @@
             <a:avLst/>
           </a:prstGeom>
           <a:solidFill>
-            <a:srgbClr val="F4F2EF"/>
+            <a:srgbClr val="FCE5CD"/>
           </a:solidFill>
           <a:ln/>
         </p:spPr>
@@ -31283,7 +31303,7 @@
             <a:avLst/>
           </a:prstGeom>
           <a:solidFill>
-            <a:srgbClr val="F4F2EF"/>
+            <a:srgbClr val="FCE5CD"/>
           </a:solidFill>
           <a:ln/>
         </p:spPr>
@@ -31424,7 +31444,7 @@
             <a:avLst/>
           </a:prstGeom>
           <a:solidFill>
-            <a:srgbClr val="F4F2EF"/>
+            <a:srgbClr val="FCE5CD"/>
           </a:solidFill>
           <a:ln/>
         </p:spPr>
@@ -31637,7 +31657,7 @@
             <a:avLst/>
           </a:prstGeom>
           <a:solidFill>
-            <a:srgbClr val="F4F2EF"/>
+            <a:srgbClr val="FCE5CD"/>
           </a:solidFill>
           <a:ln/>
         </p:spPr>
@@ -32302,7 +32322,7 @@
             <a:avLst/>
           </a:prstGeom>
           <a:solidFill>
-            <a:srgbClr val="F4F2EF"/>
+            <a:srgbClr val="FCE5CD"/>
           </a:solidFill>
           <a:ln/>
         </p:spPr>
@@ -32463,7 +32483,7 @@
             <a:avLst/>
           </a:prstGeom>
           <a:solidFill>
-            <a:srgbClr val="F4F2EF"/>
+            <a:srgbClr val="FCE5CD"/>
           </a:solidFill>
           <a:ln/>
         </p:spPr>
@@ -32624,7 +32644,7 @@
             <a:avLst/>
           </a:prstGeom>
           <a:solidFill>
-            <a:srgbClr val="F4F2EF"/>
+            <a:srgbClr val="FCE5CD"/>
           </a:solidFill>
           <a:ln/>
         </p:spPr>
@@ -33173,7 +33193,7 @@
             <a:avLst/>
           </a:prstGeom>
           <a:solidFill>
-            <a:srgbClr val="F4F2EF"/>
+            <a:srgbClr val="FCE5CD"/>
           </a:solidFill>
           <a:ln/>
         </p:spPr>
@@ -33313,7 +33333,7 @@
             <a:avLst/>
           </a:prstGeom>
           <a:solidFill>
-            <a:srgbClr val="F4F2EF"/>
+            <a:srgbClr val="FCE5CD"/>
           </a:solidFill>
           <a:ln/>
         </p:spPr>
@@ -33453,7 +33473,7 @@
             <a:avLst/>
           </a:prstGeom>
           <a:solidFill>
-            <a:srgbClr val="F4F2EF"/>
+            <a:srgbClr val="FCE5CD"/>
           </a:solidFill>
           <a:ln/>
         </p:spPr>
@@ -35703,7 +35723,7 @@
             <a:avLst/>
           </a:prstGeom>
           <a:solidFill>
-            <a:srgbClr val="F4F2EF"/>
+            <a:srgbClr val="FCE5CD"/>
           </a:solidFill>
           <a:ln/>
         </p:spPr>
@@ -35863,7 +35883,7 @@
             <a:avLst/>
           </a:prstGeom>
           <a:solidFill>
-            <a:srgbClr val="F4F2EF"/>
+            <a:srgbClr val="FCE5CD"/>
           </a:solidFill>
           <a:ln/>
         </p:spPr>
@@ -36023,7 +36043,7 @@
             <a:avLst/>
           </a:prstGeom>
           <a:solidFill>
-            <a:srgbClr val="F4F2EF"/>
+            <a:srgbClr val="FCE5CD"/>
           </a:solidFill>
           <a:ln/>
         </p:spPr>
@@ -41760,7 +41780,7 @@
             <a:avLst/>
           </a:prstGeom>
           <a:solidFill>
-            <a:srgbClr val="F4F2EF"/>
+            <a:srgbClr val="FCE5CD"/>
           </a:solidFill>
           <a:ln/>
         </p:spPr>
@@ -44840,7 +44860,7 @@
             <a:avLst/>
           </a:prstGeom>
           <a:solidFill>
-            <a:srgbClr val="F4F2EF"/>
+            <a:srgbClr val="FFF2CC"/>
           </a:solidFill>
           <a:ln/>
         </p:spPr>
@@ -44961,7 +44981,7 @@
             <a:avLst/>
           </a:prstGeom>
           <a:solidFill>
-            <a:srgbClr val="F4F2EF"/>
+            <a:srgbClr val="FFF2CC"/>
           </a:solidFill>
           <a:ln/>
         </p:spPr>
@@ -45082,7 +45102,7 @@
             <a:avLst/>
           </a:prstGeom>
           <a:solidFill>
-            <a:srgbClr val="F4F2EF"/>
+            <a:srgbClr val="FFF2CC"/>
           </a:solidFill>
           <a:ln/>
         </p:spPr>
